--- a/hs-web/WW03_주소_도메인_호스팅.pptx
+++ b/hs-web/WW03_주소_도메인_호스팅.pptx
@@ -5937,437 +5937,30 @@
           </a:p>
         </p:txBody>
       </p:sp>
-      <p:sp>
-        <p:nvSpPr>
-          <p:cNvPr id="11" name="deckgen:code"/>
-          <p:cNvSpPr txBox="1"/>
-          <p:nvPr/>
-        </p:nvSpPr>
+      <p:pic>
+        <p:nvPicPr>
+          <p:cNvPr id="11" name="deckgen:code-art" descr="image.png"/>
+          <p:cNvPicPr>
+            <a:picLocks noChangeAspect="1"/>
+          </p:cNvPicPr>
+          <p:nvPr/>
+        </p:nvPicPr>
+        <p:blipFill>
+          <a:blip r:embed="rId2"/>
+          <a:stretch>
+            <a:fillRect/>
+          </a:stretch>
+        </p:blipFill>
         <p:spPr>
           <a:xfrm>
             <a:off x="2038350" y="2552700"/>
-            <a:ext cx="14897100" cy="5105400"/>
-          </a:xfrm>
-          <a:prstGeom prst="rect">
-            <a:avLst/>
-          </a:prstGeom>
-          <a:noFill/>
-        </p:spPr>
-        <p:txBody>
-          <a:bodyPr wrap="none" lIns="0" rIns="0" tIns="0" bIns="0" anchor="t">
-            <a:spAutoFit/>
-          </a:bodyPr>
-          <a:lstStyle/>
-          <a:p>
-            <a:pPr algn="l">
-              <a:lnSpc>
-                <a:spcPct val="115000"/>
-              </a:lnSpc>
-            </a:pPr>
-            <a:r>
-              <a:rPr sz="2250" b="0">
-                <a:solidFill>
-                  <a:srgbClr val="E6EAF2"/>
-                </a:solidFill>
-                <a:latin typeface="나눔고딕코딩"/>
-                <a:ea typeface="나눔고딕코딩"/>
-                <a:cs typeface="나눔고딕코딩"/>
-              </a:rPr>
-              <a:t>hs</a:t>
-            </a:r>
-            <a:r>
-              <a:rPr sz="2250" b="0">
-                <a:solidFill>
-                  <a:srgbClr val="E6EAF2"/>
-                </a:solidFill>
-                <a:latin typeface="나눔고딕코딩"/>
-                <a:ea typeface="나눔고딕코딩"/>
-                <a:cs typeface="나눔고딕코딩"/>
-              </a:rPr>
-              <a:t>-</a:t>
-            </a:r>
-            <a:r>
-              <a:rPr sz="2250" b="0">
-                <a:solidFill>
-                  <a:srgbClr val="E6EAF2"/>
-                </a:solidFill>
-                <a:latin typeface="나눔고딕코딩"/>
-                <a:ea typeface="나눔고딕코딩"/>
-                <a:cs typeface="나눔고딕코딩"/>
-              </a:rPr>
-              <a:t>web</a:t>
-            </a:r>
-            <a:r>
-              <a:rPr sz="2250" b="0">
-                <a:solidFill>
-                  <a:srgbClr val="E6EAF2"/>
-                </a:solidFill>
-                <a:latin typeface="나눔고딕코딩"/>
-                <a:ea typeface="나눔고딕코딩"/>
-                <a:cs typeface="나눔고딕코딩"/>
-              </a:rPr>
-              <a:t> . </a:t>
-            </a:r>
-            <a:r>
-              <a:rPr sz="2250" b="0">
-                <a:solidFill>
-                  <a:srgbClr val="E6EAF2"/>
-                </a:solidFill>
-                <a:latin typeface="나눔고딕코딩"/>
-                <a:ea typeface="나눔고딕코딩"/>
-                <a:cs typeface="나눔고딕코딩"/>
-              </a:rPr>
-              <a:t>dreamitbiz</a:t>
-            </a:r>
-            <a:r>
-              <a:rPr sz="2250" b="0">
-                <a:solidFill>
-                  <a:srgbClr val="E6EAF2"/>
-                </a:solidFill>
-                <a:latin typeface="나눔고딕코딩"/>
-                <a:ea typeface="나눔고딕코딩"/>
-                <a:cs typeface="나눔고딕코딩"/>
-              </a:rPr>
-              <a:t> . </a:t>
-            </a:r>
-            <a:r>
-              <a:rPr sz="2250" b="0">
-                <a:solidFill>
-                  <a:srgbClr val="E6EAF2"/>
-                </a:solidFill>
-                <a:latin typeface="나눔고딕코딩"/>
-                <a:ea typeface="나눔고딕코딩"/>
-                <a:cs typeface="나눔고딕코딩"/>
-              </a:rPr>
-              <a:t>com</a:t>
-            </a:r>
-          </a:p>
-          <a:p>
-            <a:pPr algn="l">
-              <a:lnSpc>
-                <a:spcPct val="115000"/>
-              </a:lnSpc>
-            </a:pPr>
-            <a:r>
-              <a:rPr sz="2250" b="0">
-                <a:solidFill>
-                  <a:srgbClr val="E6EAF2"/>
-                </a:solidFill>
-                <a:latin typeface="나눔고딕코딩"/>
-                <a:ea typeface="나눔고딕코딩"/>
-                <a:cs typeface="나눔고딕코딩"/>
-              </a:rPr>
-              <a:t>  │          │          │</a:t>
-            </a:r>
-          </a:p>
-          <a:p>
-            <a:pPr algn="l">
-              <a:lnSpc>
-                <a:spcPct val="115000"/>
-              </a:lnSpc>
-            </a:pPr>
-            <a:r>
-              <a:rPr sz="2250" b="0">
-                <a:solidFill>
-                  <a:srgbClr val="E6EAF2"/>
-                </a:solidFill>
-                <a:latin typeface="나눔고딕코딩"/>
-                <a:ea typeface="나눔고딕코딩"/>
-                <a:cs typeface="나눔고딕코딩"/>
-              </a:rPr>
-              <a:t>  │          │          └ 최상위 도메인(</a:t>
-            </a:r>
-            <a:r>
-              <a:rPr sz="2250" b="0">
-                <a:solidFill>
-                  <a:srgbClr val="E6EAF2"/>
-                </a:solidFill>
-                <a:latin typeface="나눔고딕코딩"/>
-                <a:ea typeface="나눔고딕코딩"/>
-                <a:cs typeface="나눔고딕코딩"/>
-              </a:rPr>
-              <a:t>TLD</a:t>
-            </a:r>
-            <a:r>
-              <a:rPr sz="2250" b="0">
-                <a:solidFill>
-                  <a:srgbClr val="E6EAF2"/>
-                </a:solidFill>
-                <a:latin typeface="나눔고딕코딩"/>
-                <a:ea typeface="나눔고딕코딩"/>
-                <a:cs typeface="나눔고딕코딩"/>
-              </a:rPr>
-              <a:t>) — </a:t>
-            </a:r>
-            <a:r>
-              <a:rPr sz="2250" b="0">
-                <a:solidFill>
-                  <a:srgbClr val="E6EAF2"/>
-                </a:solidFill>
-                <a:latin typeface="나눔고딕코딩"/>
-                <a:ea typeface="나눔고딕코딩"/>
-                <a:cs typeface="나눔고딕코딩"/>
-              </a:rPr>
-              <a:t>com</a:t>
-            </a:r>
-            <a:r>
-              <a:rPr sz="2250" b="0">
-                <a:solidFill>
-                  <a:srgbClr val="E6EAF2"/>
-                </a:solidFill>
-                <a:latin typeface="나눔고딕코딩"/>
-                <a:ea typeface="나눔고딕코딩"/>
-                <a:cs typeface="나눔고딕코딩"/>
-              </a:rPr>
-              <a:t>, </a:t>
-            </a:r>
-            <a:r>
-              <a:rPr sz="2250" b="0">
-                <a:solidFill>
-                  <a:srgbClr val="E6EAF2"/>
-                </a:solidFill>
-                <a:latin typeface="나눔고딕코딩"/>
-                <a:ea typeface="나눔고딕코딩"/>
-                <a:cs typeface="나눔고딕코딩"/>
-              </a:rPr>
-              <a:t>kr</a:t>
-            </a:r>
-            <a:r>
-              <a:rPr sz="2250" b="0">
-                <a:solidFill>
-                  <a:srgbClr val="E6EAF2"/>
-                </a:solidFill>
-                <a:latin typeface="나눔고딕코딩"/>
-                <a:ea typeface="나눔고딕코딩"/>
-                <a:cs typeface="나눔고딕코딩"/>
-              </a:rPr>
-              <a:t>, </a:t>
-            </a:r>
-            <a:r>
-              <a:rPr sz="2250" b="0">
-                <a:solidFill>
-                  <a:srgbClr val="E6EAF2"/>
-                </a:solidFill>
-                <a:latin typeface="나눔고딕코딩"/>
-                <a:ea typeface="나눔고딕코딩"/>
-                <a:cs typeface="나눔고딕코딩"/>
-              </a:rPr>
-              <a:t>ac</a:t>
-            </a:r>
-            <a:r>
-              <a:rPr sz="2250" b="0">
-                <a:solidFill>
-                  <a:srgbClr val="E6EAF2"/>
-                </a:solidFill>
-                <a:latin typeface="나눔고딕코딩"/>
-                <a:ea typeface="나눔고딕코딩"/>
-                <a:cs typeface="나눔고딕코딩"/>
-              </a:rPr>
-              <a:t>.</a:t>
-            </a:r>
-            <a:r>
-              <a:rPr sz="2250" b="0">
-                <a:solidFill>
-                  <a:srgbClr val="E6EAF2"/>
-                </a:solidFill>
-                <a:latin typeface="나눔고딕코딩"/>
-                <a:ea typeface="나눔고딕코딩"/>
-                <a:cs typeface="나눔고딕코딩"/>
-              </a:rPr>
-              <a:t>kr</a:t>
-            </a:r>
-            <a:r>
-              <a:rPr sz="2250" b="0">
-                <a:solidFill>
-                  <a:srgbClr val="E6EAF2"/>
-                </a:solidFill>
-                <a:latin typeface="나눔고딕코딩"/>
-                <a:ea typeface="나눔고딕코딩"/>
-                <a:cs typeface="나눔고딕코딩"/>
-              </a:rPr>
-              <a:t>, </a:t>
-            </a:r>
-            <a:r>
-              <a:rPr sz="2250" b="0">
-                <a:solidFill>
-                  <a:srgbClr val="E6EAF2"/>
-                </a:solidFill>
-                <a:latin typeface="나눔고딕코딩"/>
-                <a:ea typeface="나눔고딕코딩"/>
-                <a:cs typeface="나눔고딕코딩"/>
-              </a:rPr>
-              <a:t>io</a:t>
-            </a:r>
-            <a:r>
-              <a:rPr sz="2250" b="0">
-                <a:solidFill>
-                  <a:srgbClr val="E6EAF2"/>
-                </a:solidFill>
-                <a:latin typeface="나눔고딕코딩"/>
-                <a:ea typeface="나눔고딕코딩"/>
-                <a:cs typeface="나눔고딕코딩"/>
-              </a:rPr>
-              <a:t> ...</a:t>
-            </a:r>
-          </a:p>
-          <a:p>
-            <a:pPr algn="l">
-              <a:lnSpc>
-                <a:spcPct val="115000"/>
-              </a:lnSpc>
-            </a:pPr>
-            <a:r>
-              <a:rPr sz="2250" b="0">
-                <a:solidFill>
-                  <a:srgbClr val="E6EAF2"/>
-                </a:solidFill>
-                <a:latin typeface="나눔고딕코딩"/>
-                <a:ea typeface="나눔고딕코딩"/>
-                <a:cs typeface="나눔고딕코딩"/>
-              </a:rPr>
-              <a:t>  │          └ 2단계 도메인 — 실제로 등록하고 돈을 내는 부분</a:t>
-            </a:r>
-          </a:p>
-          <a:p>
-            <a:pPr algn="l">
-              <a:lnSpc>
-                <a:spcPct val="115000"/>
-              </a:lnSpc>
-            </a:pPr>
-            <a:r>
-              <a:rPr sz="2250" b="0">
-                <a:solidFill>
-                  <a:srgbClr val="E6EAF2"/>
-                </a:solidFill>
-                <a:latin typeface="나눔고딕코딩"/>
-                <a:ea typeface="나눔고딕코딩"/>
-                <a:cs typeface="나눔고딕코딩"/>
-              </a:rPr>
-              <a:t>  └ 서브도메인 — 등록자가 마음대로 만들 수 있다 (</a:t>
-            </a:r>
-            <a:r>
-              <a:rPr sz="2250" b="0">
-                <a:solidFill>
-                  <a:srgbClr val="E6EAF2"/>
-                </a:solidFill>
-                <a:latin typeface="나눔고딕코딩"/>
-                <a:ea typeface="나눔고딕코딩"/>
-                <a:cs typeface="나눔고딕코딩"/>
-              </a:rPr>
-              <a:t>www</a:t>
-            </a:r>
-            <a:r>
-              <a:rPr sz="2250" b="0">
-                <a:solidFill>
-                  <a:srgbClr val="E6EAF2"/>
-                </a:solidFill>
-                <a:latin typeface="나눔고딕코딩"/>
-                <a:ea typeface="나눔고딕코딩"/>
-                <a:cs typeface="나눔고딕코딩"/>
-              </a:rPr>
-              <a:t>, </a:t>
-            </a:r>
-            <a:r>
-              <a:rPr sz="2250" b="0">
-                <a:solidFill>
-                  <a:srgbClr val="E6EAF2"/>
-                </a:solidFill>
-                <a:latin typeface="나눔고딕코딩"/>
-                <a:ea typeface="나눔고딕코딩"/>
-                <a:cs typeface="나눔고딕코딩"/>
-              </a:rPr>
-              <a:t>blog</a:t>
-            </a:r>
-            <a:r>
-              <a:rPr sz="2250" b="0">
-                <a:solidFill>
-                  <a:srgbClr val="E6EAF2"/>
-                </a:solidFill>
-                <a:latin typeface="나눔고딕코딩"/>
-                <a:ea typeface="나눔고딕코딩"/>
-                <a:cs typeface="나눔고딕코딩"/>
-              </a:rPr>
-              <a:t>, </a:t>
-            </a:r>
-            <a:r>
-              <a:rPr sz="2250" b="0">
-                <a:solidFill>
-                  <a:srgbClr val="E6EAF2"/>
-                </a:solidFill>
-                <a:latin typeface="나눔고딕코딩"/>
-                <a:ea typeface="나눔고딕코딩"/>
-                <a:cs typeface="나눔고딕코딩"/>
-              </a:rPr>
-              <a:t>api</a:t>
-            </a:r>
-            <a:r>
-              <a:rPr sz="2250" b="0">
-                <a:solidFill>
-                  <a:srgbClr val="E6EAF2"/>
-                </a:solidFill>
-                <a:latin typeface="나눔고딕코딩"/>
-                <a:ea typeface="나눔고딕코딩"/>
-                <a:cs typeface="나눔고딕코딩"/>
-              </a:rPr>
-              <a:t> ...)</a:t>
-            </a:r>
-          </a:p>
-          <a:p>
-            <a:pPr algn="l">
-              <a:lnSpc>
-                <a:spcPct val="115000"/>
-              </a:lnSpc>
-            </a:pPr>
-            <a:r>
-              <a:rPr sz="2250" b="0">
-                <a:solidFill>
-                  <a:srgbClr val="E6EAF2"/>
-                </a:solidFill>
-                <a:latin typeface="나눔고딕코딩"/>
-                <a:ea typeface="나눔고딕코딩"/>
-                <a:cs typeface="나눔고딕코딩"/>
-              </a:rPr>
-              <a:t/>
-            </a:r>
-          </a:p>
-          <a:p>
-            <a:pPr algn="l">
-              <a:lnSpc>
-                <a:spcPct val="115000"/>
-              </a:lnSpc>
-            </a:pPr>
-            <a:r>
-              <a:rPr sz="2250" b="0">
-                <a:solidFill>
-                  <a:srgbClr val="8F9DB5"/>
-                </a:solidFill>
-                <a:latin typeface="나눔고딕코딩"/>
-                <a:ea typeface="나눔고딕코딩"/>
-                <a:cs typeface="나눔고딕코딩"/>
-              </a:rPr>
-              <a:t>/* 하나의 도메인을 등록하면 서브도메인은 얼마든지 만들 수 있습니다.</a:t>
-            </a:r>
-          </a:p>
-          <a:p>
-            <a:pPr algn="l">
-              <a:lnSpc>
-                <a:spcPct val="115000"/>
-              </a:lnSpc>
-            </a:pPr>
-            <a:r>
-              <a:rPr sz="2250" b="0">
-                <a:solidFill>
-                  <a:srgbClr val="8F9DB5"/>
-                </a:solidFill>
-                <a:latin typeface="나눔고딕코딩"/>
-                <a:ea typeface="나눔고딕코딩"/>
-                <a:cs typeface="나눔고딕코딩"/>
-              </a:rPr>
-              <a:t>   www.example.com 과 blog.example.com 은 같은 도메인의 다른 서브도메인입니다. */</a:t>
-            </a:r>
-          </a:p>
-        </p:txBody>
-      </p:sp>
+            <a:ext cx="10296525" cy="3162300"/>
+          </a:xfrm>
+          <a:prstGeom prst="rect">
+            <a:avLst/>
+          </a:prstGeom>
+        </p:spPr>
+      </p:pic>
       <p:sp>
         <p:nvSpPr>
           <p:cNvPr id="12" name="Rectangle 11"/>
@@ -27355,7 +26948,7 @@
               </a:lnSpc>
             </a:pPr>
             <a:r>
-              <a:rPr sz="2025" b="0">
+              <a:rPr sz="2250" b="0">
                 <a:solidFill>
                   <a:srgbClr val="7A869C"/>
                 </a:solidFill>
@@ -27373,7 +26966,7 @@
               </a:lnSpc>
             </a:pPr>
             <a:r>
-              <a:rPr sz="2025" b="0">
+              <a:rPr sz="2250" b="0">
                 <a:solidFill>
                   <a:srgbClr val="7A869C"/>
                 </a:solidFill>
@@ -27391,7 +26984,7 @@
               </a:lnSpc>
             </a:pPr>
             <a:r>
-              <a:rPr sz="2025" b="0">
+              <a:rPr sz="2250" b="0">
                 <a:solidFill>
                   <a:srgbClr val="7A869C"/>
                 </a:solidFill>
@@ -27409,7 +27002,7 @@
               </a:lnSpc>
             </a:pPr>
             <a:r>
-              <a:rPr sz="2025" b="0">
+              <a:rPr sz="2250" b="0">
                 <a:solidFill>
                   <a:srgbClr val="7A869C"/>
                 </a:solidFill>
@@ -27427,7 +27020,7 @@
               </a:lnSpc>
             </a:pPr>
             <a:r>
-              <a:rPr sz="2025" b="0">
+              <a:rPr sz="2250" b="0">
                 <a:solidFill>
                   <a:srgbClr val="7A869C"/>
                 </a:solidFill>
@@ -27445,7 +27038,7 @@
               </a:lnSpc>
             </a:pPr>
             <a:r>
-              <a:rPr sz="2025" b="0">
+              <a:rPr sz="2250" b="0">
                 <a:solidFill>
                   <a:srgbClr val="7A869C"/>
                 </a:solidFill>
@@ -27463,7 +27056,7 @@
               </a:lnSpc>
             </a:pPr>
             <a:r>
-              <a:rPr sz="2025" b="0">
+              <a:rPr sz="2250" b="0">
                 <a:solidFill>
                   <a:srgbClr val="7A869C"/>
                 </a:solidFill>
@@ -27481,7 +27074,7 @@
               </a:lnSpc>
             </a:pPr>
             <a:r>
-              <a:rPr sz="2025" b="0">
+              <a:rPr sz="2250" b="0">
                 <a:solidFill>
                   <a:srgbClr val="7A869C"/>
                 </a:solidFill>
@@ -27494,261 +27087,30 @@
           </a:p>
         </p:txBody>
       </p:sp>
-      <p:sp>
-        <p:nvSpPr>
-          <p:cNvPr id="11" name="deckgen:code"/>
-          <p:cNvSpPr txBox="1"/>
-          <p:nvPr/>
-        </p:nvSpPr>
+      <p:pic>
+        <p:nvPicPr>
+          <p:cNvPr id="11" name="deckgen:code-art" descr="image.png"/>
+          <p:cNvPicPr>
+            <a:picLocks noChangeAspect="1"/>
+          </p:cNvPicPr>
+          <p:nvPr/>
+        </p:nvPicPr>
+        <p:blipFill>
+          <a:blip r:embed="rId2"/>
+          <a:stretch>
+            <a:fillRect/>
+          </a:stretch>
+        </p:blipFill>
         <p:spPr>
           <a:xfrm>
             <a:off x="2038350" y="2552700"/>
-            <a:ext cx="14897100" cy="5105400"/>
-          </a:xfrm>
-          <a:prstGeom prst="rect">
-            <a:avLst/>
-          </a:prstGeom>
-          <a:noFill/>
-        </p:spPr>
-        <p:txBody>
-          <a:bodyPr wrap="none" lIns="0" rIns="0" tIns="0" bIns="0" anchor="t">
-            <a:spAutoFit/>
-          </a:bodyPr>
-          <a:lstStyle/>
-          <a:p>
-            <a:pPr algn="l">
-              <a:lnSpc>
-                <a:spcPct val="115000"/>
-              </a:lnSpc>
-            </a:pPr>
-            <a:r>
-              <a:rPr sz="2025" b="0">
-                <a:solidFill>
-                  <a:srgbClr val="E6EAF2"/>
-                </a:solidFill>
-                <a:latin typeface="나눔고딕코딩"/>
-                <a:ea typeface="나눔고딕코딩"/>
-                <a:cs typeface="나눔고딕코딩"/>
-              </a:rPr>
-              <a:t>https</a:t>
-            </a:r>
-            <a:r>
-              <a:rPr sz="2025" b="0">
-                <a:solidFill>
-                  <a:srgbClr val="E6EAF2"/>
-                </a:solidFill>
-                <a:latin typeface="나눔고딕코딩"/>
-                <a:ea typeface="나눔고딕코딩"/>
-                <a:cs typeface="나눔고딕코딩"/>
-              </a:rPr>
-              <a:t>:</a:t>
-            </a:r>
-            <a:r>
-              <a:rPr sz="2025" b="0">
-                <a:solidFill>
-                  <a:srgbClr val="8F9DB5"/>
-                </a:solidFill>
-                <a:latin typeface="나눔고딕코딩"/>
-                <a:ea typeface="나눔고딕코딩"/>
-                <a:cs typeface="나눔고딕코딩"/>
-              </a:rPr>
-              <a:t>//hs-web.dreamitbiz.com:443/weeks/3?tab=lab#lab-w3-1</a:t>
-            </a:r>
-          </a:p>
-          <a:p>
-            <a:pPr algn="l">
-              <a:lnSpc>
-                <a:spcPct val="115000"/>
-              </a:lnSpc>
-            </a:pPr>
-            <a:r>
-              <a:rPr sz="2025" b="0">
-                <a:solidFill>
-                  <a:srgbClr val="E6EAF2"/>
-                </a:solidFill>
-                <a:latin typeface="나눔고딕코딩"/>
-                <a:ea typeface="나눔고딕코딩"/>
-                <a:cs typeface="나눔고딕코딩"/>
-              </a:rPr>
-              <a:t>└─┬─┘   └───────────┬──────────┘└┬┘└──┬──┘└──┬──┘└───┬───┘</a:t>
-            </a:r>
-          </a:p>
-          <a:p>
-            <a:pPr algn="l">
-              <a:lnSpc>
-                <a:spcPct val="115000"/>
-              </a:lnSpc>
-            </a:pPr>
-            <a:r>
-              <a:rPr sz="2025" b="0">
-                <a:solidFill>
-                  <a:srgbClr val="E6EAF2"/>
-                </a:solidFill>
-                <a:latin typeface="나눔고딕코딩"/>
-                <a:ea typeface="나눔고딕코딩"/>
-                <a:cs typeface="나눔고딕코딩"/>
-              </a:rPr>
-              <a:t>  │                 │            │    │      │       └ 프래그먼트 — 문서 안 위치</a:t>
-            </a:r>
-          </a:p>
-          <a:p>
-            <a:pPr algn="l">
-              <a:lnSpc>
-                <a:spcPct val="115000"/>
-              </a:lnSpc>
-            </a:pPr>
-            <a:r>
-              <a:rPr sz="2025" b="0">
-                <a:solidFill>
-                  <a:srgbClr val="E6EAF2"/>
-                </a:solidFill>
-                <a:latin typeface="나눔고딕코딩"/>
-                <a:ea typeface="나눔고딕코딩"/>
-                <a:cs typeface="나눔고딕코딩"/>
-              </a:rPr>
-              <a:t>  │                 │            │    │      └ 질의 문자열 — 부가 조건</a:t>
-            </a:r>
-          </a:p>
-          <a:p>
-            <a:pPr algn="l">
-              <a:lnSpc>
-                <a:spcPct val="115000"/>
-              </a:lnSpc>
-            </a:pPr>
-            <a:r>
-              <a:rPr sz="2025" b="0">
-                <a:solidFill>
-                  <a:srgbClr val="E6EAF2"/>
-                </a:solidFill>
-                <a:latin typeface="나눔고딕코딩"/>
-                <a:ea typeface="나눔고딕코딩"/>
-                <a:cs typeface="나눔고딕코딩"/>
-              </a:rPr>
-              <a:t>  │                 │            │    └ 경로 — 어떤 문서인가</a:t>
-            </a:r>
-          </a:p>
-          <a:p>
-            <a:pPr algn="l">
-              <a:lnSpc>
-                <a:spcPct val="115000"/>
-              </a:lnSpc>
-            </a:pPr>
-            <a:r>
-              <a:rPr sz="2025" b="0">
-                <a:solidFill>
-                  <a:srgbClr val="E6EAF2"/>
-                </a:solidFill>
-                <a:latin typeface="나눔고딕코딩"/>
-                <a:ea typeface="나눔고딕코딩"/>
-                <a:cs typeface="나눔고딕코딩"/>
-              </a:rPr>
-              <a:t>  │                 │            └ 포트 (</a:t>
-            </a:r>
-            <a:r>
-              <a:rPr sz="2025" b="0">
-                <a:solidFill>
-                  <a:srgbClr val="E6EAF2"/>
-                </a:solidFill>
-                <a:latin typeface="나눔고딕코딩"/>
-                <a:ea typeface="나눔고딕코딩"/>
-                <a:cs typeface="나눔고딕코딩"/>
-              </a:rPr>
-              <a:t>http</a:t>
-            </a:r>
-            <a:r>
-              <a:rPr sz="2025" b="0">
-                <a:solidFill>
-                  <a:srgbClr val="E6EAF2"/>
-                </a:solidFill>
-                <a:latin typeface="나눔고딕코딩"/>
-                <a:ea typeface="나눔고딕코딩"/>
-                <a:cs typeface="나눔고딕코딩"/>
-              </a:rPr>
-              <a:t>=</a:t>
-            </a:r>
-            <a:r>
-              <a:rPr sz="2025" b="0">
-                <a:solidFill>
-                  <a:srgbClr val="FFB08A"/>
-                </a:solidFill>
-                <a:latin typeface="나눔고딕코딩"/>
-                <a:ea typeface="나눔고딕코딩"/>
-                <a:cs typeface="나눔고딕코딩"/>
-              </a:rPr>
-              <a:t>80</a:t>
-            </a:r>
-            <a:r>
-              <a:rPr sz="2025" b="0">
-                <a:solidFill>
-                  <a:srgbClr val="E6EAF2"/>
-                </a:solidFill>
-                <a:latin typeface="나눔고딕코딩"/>
-                <a:ea typeface="나눔고딕코딩"/>
-                <a:cs typeface="나눔고딕코딩"/>
-              </a:rPr>
-              <a:t>, </a:t>
-            </a:r>
-            <a:r>
-              <a:rPr sz="2025" b="0">
-                <a:solidFill>
-                  <a:srgbClr val="E6EAF2"/>
-                </a:solidFill>
-                <a:latin typeface="나눔고딕코딩"/>
-                <a:ea typeface="나눔고딕코딩"/>
-                <a:cs typeface="나눔고딕코딩"/>
-              </a:rPr>
-              <a:t>https</a:t>
-            </a:r>
-            <a:r>
-              <a:rPr sz="2025" b="0">
-                <a:solidFill>
-                  <a:srgbClr val="E6EAF2"/>
-                </a:solidFill>
-                <a:latin typeface="나눔고딕코딩"/>
-                <a:ea typeface="나눔고딕코딩"/>
-                <a:cs typeface="나눔고딕코딩"/>
-              </a:rPr>
-              <a:t>=443이면 생략)</a:t>
-            </a:r>
-          </a:p>
-          <a:p>
-            <a:pPr algn="l">
-              <a:lnSpc>
-                <a:spcPct val="115000"/>
-              </a:lnSpc>
-            </a:pPr>
-            <a:r>
-              <a:rPr sz="2025" b="0">
-                <a:solidFill>
-                  <a:srgbClr val="E6EAF2"/>
-                </a:solidFill>
-                <a:latin typeface="나눔고딕코딩"/>
-                <a:ea typeface="나눔고딕코딩"/>
-                <a:cs typeface="나눔고딕코딩"/>
-              </a:rPr>
-              <a:t>  │                 └ 호스트 — 어느 컴퓨터인가</a:t>
-            </a:r>
-          </a:p>
-          <a:p>
-            <a:pPr algn="l">
-              <a:lnSpc>
-                <a:spcPct val="115000"/>
-              </a:lnSpc>
-            </a:pPr>
-            <a:r>
-              <a:rPr sz="2025" b="0">
-                <a:solidFill>
-                  <a:srgbClr val="E6EAF2"/>
-                </a:solidFill>
-                <a:latin typeface="나눔고딕코딩"/>
-                <a:ea typeface="나눔고딕코딩"/>
-                <a:cs typeface="나눔고딕코딩"/>
-              </a:rPr>
-              <a:t>  └ 프로토콜 — 어떤 규칙으로 주고받을 것인가</a:t>
-            </a:r>
-          </a:p>
-        </p:txBody>
-      </p:sp>
+            <a:ext cx="10725150" cy="3162300"/>
+          </a:xfrm>
+          <a:prstGeom prst="rect">
+            <a:avLst/>
+          </a:prstGeom>
+        </p:spPr>
+      </p:pic>
       <p:sp>
         <p:nvSpPr>
           <p:cNvPr id="12" name="Rectangle 11"/>
